--- a/docs/Concept_presentation.pptx
+++ b/docs/Concept_presentation.pptx
@@ -126,6 +126,74 @@
     </p:ext>
   </p:extLst>
 </p:presentation>
+</file>
+
+<file path=ppt/revisionInfo.xml><?xml version="1.0" encoding="utf-8"?>
+<p1510:revInfo xmlns:a="http://schemas.openxmlformats.org/drawingml/2006/main" xmlns:r="http://schemas.openxmlformats.org/officeDocument/2006/relationships" xmlns:p1510="http://schemas.microsoft.com/office/powerpoint/2015/10/main">
+  <p1510:revLst>
+    <p1510:client id="{FAFC3AC4-C3E9-4E97-9F69-C31E4452F7A0}" v="11" dt="2026-03-22T10:35:31.647"/>
+  </p1510:revLst>
+</p1510:revInfo>
+</file>
+
+<file path=ppt/changesInfos/changesInfo1.xml><?xml version="1.0" encoding="utf-8"?>
+<pc:chgInfo xmlns:a="http://schemas.openxmlformats.org/drawingml/2006/main" xmlns:r="http://schemas.openxmlformats.org/officeDocument/2006/relationships" xmlns:ac="http://schemas.microsoft.com/office/drawing/2013/main/command" xmlns:pc="http://schemas.microsoft.com/office/powerpoint/2013/main/command">
+  <pc:docChgLst>
+    <pc:chgData name="Jason Sajovic" userId="1cc889bff55a8228" providerId="LiveId" clId="{4DE00E38-F02F-4C6B-920B-751FC5AE9438}"/>
+    <pc:docChg chg="modSld">
+      <pc:chgData name="Jason Sajovic" userId="1cc889bff55a8228" providerId="LiveId" clId="{4DE00E38-F02F-4C6B-920B-751FC5AE9438}" dt="2026-03-22T10:35:31.647" v="37" actId="20578"/>
+      <pc:docMkLst>
+        <pc:docMk/>
+      </pc:docMkLst>
+      <pc:sldChg chg="modSp mod">
+        <pc:chgData name="Jason Sajovic" userId="1cc889bff55a8228" providerId="LiveId" clId="{4DE00E38-F02F-4C6B-920B-751FC5AE9438}" dt="2026-03-22T10:35:31.647" v="37" actId="20578"/>
+        <pc:sldMkLst>
+          <pc:docMk/>
+          <pc:sldMk cId="714741106" sldId="258"/>
+        </pc:sldMkLst>
+        <pc:spChg chg="mod">
+          <ac:chgData name="Jason Sajovic" userId="1cc889bff55a8228" providerId="LiveId" clId="{4DE00E38-F02F-4C6B-920B-751FC5AE9438}" dt="2026-03-22T10:35:31.647" v="37" actId="20578"/>
+          <ac:spMkLst>
+            <pc:docMk/>
+            <pc:sldMk cId="714741106" sldId="258"/>
+            <ac:spMk id="2" creationId="{228C5E49-9438-52C9-E171-961E6CB123F8}"/>
+          </ac:spMkLst>
+        </pc:spChg>
+      </pc:sldChg>
+      <pc:sldChg chg="addSp delSp modSp mod">
+        <pc:chgData name="Jason Sajovic" userId="1cc889bff55a8228" providerId="LiveId" clId="{4DE00E38-F02F-4C6B-920B-751FC5AE9438}" dt="2026-03-22T10:34:44.546" v="19" actId="1076"/>
+        <pc:sldMkLst>
+          <pc:docMk/>
+          <pc:sldMk cId="2173735379" sldId="261"/>
+        </pc:sldMkLst>
+        <pc:spChg chg="add del">
+          <ac:chgData name="Jason Sajovic" userId="1cc889bff55a8228" providerId="LiveId" clId="{4DE00E38-F02F-4C6B-920B-751FC5AE9438}" dt="2026-03-22T10:33:21.309" v="2" actId="478"/>
+          <ac:spMkLst>
+            <pc:docMk/>
+            <pc:sldMk cId="2173735379" sldId="261"/>
+            <ac:spMk id="3" creationId="{E9696DB4-5750-5CC5-D280-4F779B1E396C}"/>
+          </ac:spMkLst>
+        </pc:spChg>
+        <pc:graphicFrameChg chg="mod">
+          <ac:chgData name="Jason Sajovic" userId="1cc889bff55a8228" providerId="LiveId" clId="{4DE00E38-F02F-4C6B-920B-751FC5AE9438}" dt="2026-03-22T10:34:18.364" v="15" actId="478"/>
+          <ac:graphicFrameMkLst>
+            <pc:docMk/>
+            <pc:sldMk cId="2173735379" sldId="261"/>
+            <ac:graphicFrameMk id="6" creationId="{8318E76F-4576-0A31-D152-A2CE9F20347C}"/>
+          </ac:graphicFrameMkLst>
+        </pc:graphicFrameChg>
+        <pc:picChg chg="add mod modCrop">
+          <ac:chgData name="Jason Sajovic" userId="1cc889bff55a8228" providerId="LiveId" clId="{4DE00E38-F02F-4C6B-920B-751FC5AE9438}" dt="2026-03-22T10:34:44.546" v="19" actId="1076"/>
+          <ac:picMkLst>
+            <pc:docMk/>
+            <pc:sldMk cId="2173735379" sldId="261"/>
+            <ac:picMk id="7" creationId="{4B2B4173-09CA-1F11-04DA-1C8D72095470}"/>
+          </ac:picMkLst>
+        </pc:picChg>
+      </pc:sldChg>
+    </pc:docChg>
+  </pc:docChgLst>
+</pc:chgInfo>
 </file>
 
 <file path=ppt/diagrams/colors1.xml><?xml version="1.0" encoding="utf-8"?>
@@ -889,244 +957,6 @@
         </a:p>
       </dgm:t>
     </dgm:pt>
-    <dgm:pt modelId="{2D5CF550-4FEE-42AC-BA8F-8CE7EC76C554}">
-      <dgm:prSet/>
-      <dgm:spPr/>
-      <dgm:t>
-        <a:bodyPr/>
-        <a:lstStyle/>
-        <a:p>
-          <a:r>
-            <a:rPr lang="en-GB" dirty="0"/>
-            <a:t>User Input</a:t>
-          </a:r>
-          <a:endParaRPr lang="en-US" dirty="0"/>
-        </a:p>
-      </dgm:t>
-    </dgm:pt>
-    <dgm:pt modelId="{0F6B2D0A-4A8A-4B0C-9991-14419C2B9FF3}" type="parTrans" cxnId="{77B9F7E4-C0C4-4BE4-BD8B-6423F89964AC}">
-      <dgm:prSet/>
-      <dgm:spPr/>
-      <dgm:t>
-        <a:bodyPr/>
-        <a:lstStyle/>
-        <a:p>
-          <a:endParaRPr lang="en-US"/>
-        </a:p>
-      </dgm:t>
-    </dgm:pt>
-    <dgm:pt modelId="{CE70F5C8-4B90-49EF-945F-87B26016C58D}" type="sibTrans" cxnId="{77B9F7E4-C0C4-4BE4-BD8B-6423F89964AC}">
-      <dgm:prSet/>
-      <dgm:spPr/>
-      <dgm:t>
-        <a:bodyPr/>
-        <a:lstStyle/>
-        <a:p>
-          <a:endParaRPr lang="en-US"/>
-        </a:p>
-      </dgm:t>
-    </dgm:pt>
-    <dgm:pt modelId="{225A34C3-4361-4FAD-AA49-F50FA5E5DFE0}">
-      <dgm:prSet/>
-      <dgm:spPr/>
-      <dgm:t>
-        <a:bodyPr/>
-        <a:lstStyle/>
-        <a:p>
-          <a:r>
-            <a:rPr lang="en-GB" dirty="0" err="1"/>
-            <a:t>Groq</a:t>
-          </a:r>
-          <a:r>
-            <a:rPr lang="en-GB" dirty="0"/>
-            <a:t> AI (Whisper-Large für STT)</a:t>
-          </a:r>
-          <a:endParaRPr lang="en-US" dirty="0"/>
-        </a:p>
-      </dgm:t>
-    </dgm:pt>
-    <dgm:pt modelId="{517275C4-0198-47A2-A60D-BFB5A00E67D0}" type="parTrans" cxnId="{486B184C-3A92-441A-BB88-52C96437FE7F}">
-      <dgm:prSet/>
-      <dgm:spPr/>
-      <dgm:t>
-        <a:bodyPr/>
-        <a:lstStyle/>
-        <a:p>
-          <a:endParaRPr lang="en-US"/>
-        </a:p>
-      </dgm:t>
-    </dgm:pt>
-    <dgm:pt modelId="{7BC1F7DB-216E-429A-A17E-4CED852C08D5}" type="sibTrans" cxnId="{486B184C-3A92-441A-BB88-52C96437FE7F}">
-      <dgm:prSet/>
-      <dgm:spPr/>
-      <dgm:t>
-        <a:bodyPr/>
-        <a:lstStyle/>
-        <a:p>
-          <a:endParaRPr lang="en-US"/>
-        </a:p>
-      </dgm:t>
-    </dgm:pt>
-    <dgm:pt modelId="{D5D67524-3570-4647-8405-4334CD284133}">
-      <dgm:prSet/>
-      <dgm:spPr/>
-      <dgm:t>
-        <a:bodyPr/>
-        <a:lstStyle/>
-        <a:p>
-          <a:r>
-            <a:rPr lang="en-GB" dirty="0"/>
-            <a:t>Llama3.3 70b für </a:t>
-          </a:r>
-          <a:r>
-            <a:rPr lang="en-GB" dirty="0" err="1"/>
-            <a:t>semantische</a:t>
-          </a:r>
-          <a:r>
-            <a:rPr lang="en-GB" dirty="0"/>
-            <a:t> Analyse</a:t>
-          </a:r>
-          <a:endParaRPr lang="en-US" dirty="0"/>
-        </a:p>
-      </dgm:t>
-    </dgm:pt>
-    <dgm:pt modelId="{64FCBB5A-6DE4-4F61-B7D8-D42FD73F215D}" type="parTrans" cxnId="{C06A87EB-8B2B-41FD-AF37-0F16A77E286E}">
-      <dgm:prSet/>
-      <dgm:spPr/>
-      <dgm:t>
-        <a:bodyPr/>
-        <a:lstStyle/>
-        <a:p>
-          <a:endParaRPr lang="en-US"/>
-        </a:p>
-      </dgm:t>
-    </dgm:pt>
-    <dgm:pt modelId="{E0470548-B5CF-402F-97D8-C3EC515AAFAA}" type="sibTrans" cxnId="{C06A87EB-8B2B-41FD-AF37-0F16A77E286E}">
-      <dgm:prSet/>
-      <dgm:spPr/>
-      <dgm:t>
-        <a:bodyPr/>
-        <a:lstStyle/>
-        <a:p>
-          <a:endParaRPr lang="en-US"/>
-        </a:p>
-      </dgm:t>
-    </dgm:pt>
-    <dgm:pt modelId="{92FF9449-A242-4394-B5EB-806FC9F4ABBC}">
-      <dgm:prSet/>
-      <dgm:spPr/>
-      <dgm:t>
-        <a:bodyPr/>
-        <a:lstStyle/>
-        <a:p>
-          <a:r>
-            <a:rPr lang="en-GB"/>
-            <a:t>Supabase für Datenspeicherung </a:t>
-          </a:r>
-          <a:endParaRPr lang="en-US"/>
-        </a:p>
-      </dgm:t>
-    </dgm:pt>
-    <dgm:pt modelId="{5F33266E-3BB7-4EB6-9D78-C816ACF83B7B}" type="parTrans" cxnId="{18D1D086-2496-4499-A8FA-082F9068D5BF}">
-      <dgm:prSet/>
-      <dgm:spPr/>
-      <dgm:t>
-        <a:bodyPr/>
-        <a:lstStyle/>
-        <a:p>
-          <a:endParaRPr lang="en-US"/>
-        </a:p>
-      </dgm:t>
-    </dgm:pt>
-    <dgm:pt modelId="{16F5D80C-CC65-42F1-BA3C-AAB8FB329296}" type="sibTrans" cxnId="{18D1D086-2496-4499-A8FA-082F9068D5BF}">
-      <dgm:prSet/>
-      <dgm:spPr/>
-      <dgm:t>
-        <a:bodyPr/>
-        <a:lstStyle/>
-        <a:p>
-          <a:endParaRPr lang="en-US"/>
-        </a:p>
-      </dgm:t>
-    </dgm:pt>
-    <dgm:pt modelId="{97C4D82F-1611-49FB-B459-C07DB54DE587}">
-      <dgm:prSet/>
-      <dgm:spPr/>
-      <dgm:t>
-        <a:bodyPr/>
-        <a:lstStyle/>
-        <a:p>
-          <a:r>
-            <a:rPr lang="en-GB" dirty="0"/>
-            <a:t>Output</a:t>
-          </a:r>
-          <a:endParaRPr lang="en-US" dirty="0"/>
-        </a:p>
-      </dgm:t>
-    </dgm:pt>
-    <dgm:pt modelId="{C179129C-511A-4EB6-A2F0-480C186F55BA}" type="parTrans" cxnId="{1EEE3D7F-B786-4A1F-B061-9575B63AEEB5}">
-      <dgm:prSet/>
-      <dgm:spPr/>
-      <dgm:t>
-        <a:bodyPr/>
-        <a:lstStyle/>
-        <a:p>
-          <a:endParaRPr lang="en-US"/>
-        </a:p>
-      </dgm:t>
-    </dgm:pt>
-    <dgm:pt modelId="{B93E0B91-A60F-4943-BF56-B8E490587656}" type="sibTrans" cxnId="{1EEE3D7F-B786-4A1F-B061-9575B63AEEB5}">
-      <dgm:prSet/>
-      <dgm:spPr/>
-      <dgm:t>
-        <a:bodyPr/>
-        <a:lstStyle/>
-        <a:p>
-          <a:endParaRPr lang="en-US"/>
-        </a:p>
-      </dgm:t>
-    </dgm:pt>
-    <dgm:pt modelId="{1D3BD650-89EA-4225-8C5F-59B752EC29B5}">
-      <dgm:prSet/>
-      <dgm:spPr/>
-      <dgm:t>
-        <a:bodyPr/>
-        <a:lstStyle/>
-        <a:p>
-          <a:r>
-            <a:rPr lang="en-GB" dirty="0" err="1"/>
-            <a:t>Streamlit</a:t>
-          </a:r>
-          <a:r>
-            <a:rPr lang="en-GB" dirty="0"/>
-            <a:t> UI</a:t>
-          </a:r>
-          <a:endParaRPr lang="en-US" dirty="0"/>
-        </a:p>
-      </dgm:t>
-    </dgm:pt>
-    <dgm:pt modelId="{24B70A62-97F0-42C7-A41D-B44989A57C61}" type="parTrans" cxnId="{C4E02B2C-25D9-4F30-8797-902E77492D7C}">
-      <dgm:prSet/>
-      <dgm:spPr/>
-      <dgm:t>
-        <a:bodyPr/>
-        <a:lstStyle/>
-        <a:p>
-          <a:endParaRPr lang="LID4096"/>
-        </a:p>
-      </dgm:t>
-    </dgm:pt>
-    <dgm:pt modelId="{96A2CA2C-3233-4FDA-957F-44D10B68046E}" type="sibTrans" cxnId="{C4E02B2C-25D9-4F30-8797-902E77492D7C}">
-      <dgm:prSet/>
-      <dgm:spPr/>
-      <dgm:t>
-        <a:bodyPr/>
-        <a:lstStyle/>
-        <a:p>
-          <a:endParaRPr lang="LID4096"/>
-        </a:p>
-      </dgm:t>
-    </dgm:pt>
     <dgm:pt modelId="{DF2C30CB-E015-406C-B2E6-E31DA278BF6E}" type="pres">
       <dgm:prSet presAssocID="{877DE1CA-25A3-4626-8323-8AA05FAEB59F}" presName="Name0" presStyleCnt="0">
         <dgm:presLayoutVars>
@@ -1136,100 +966,9 @@
       </dgm:prSet>
       <dgm:spPr/>
     </dgm:pt>
-    <dgm:pt modelId="{17F2F626-64C4-4E99-8A1A-63B669781CCA}" type="pres">
-      <dgm:prSet presAssocID="{2D5CF550-4FEE-42AC-BA8F-8CE7EC76C554}" presName="node" presStyleLbl="node1" presStyleIdx="0" presStyleCnt="6">
-        <dgm:presLayoutVars>
-          <dgm:bulletEnabled val="1"/>
-        </dgm:presLayoutVars>
-      </dgm:prSet>
-      <dgm:spPr/>
-    </dgm:pt>
-    <dgm:pt modelId="{862F16FC-C970-47EB-91E5-C2822D309234}" type="pres">
-      <dgm:prSet presAssocID="{CE70F5C8-4B90-49EF-945F-87B26016C58D}" presName="sibTrans" presStyleCnt="0"/>
-      <dgm:spPr/>
-    </dgm:pt>
-    <dgm:pt modelId="{24E4B390-B070-4B01-B1C8-BB6E6030A606}" type="pres">
-      <dgm:prSet presAssocID="{1D3BD650-89EA-4225-8C5F-59B752EC29B5}" presName="node" presStyleLbl="node1" presStyleIdx="1" presStyleCnt="6">
-        <dgm:presLayoutVars>
-          <dgm:bulletEnabled val="1"/>
-        </dgm:presLayoutVars>
-      </dgm:prSet>
-      <dgm:spPr/>
-    </dgm:pt>
-    <dgm:pt modelId="{2E68FC82-4489-49A6-B0E1-CC46A8978288}" type="pres">
-      <dgm:prSet presAssocID="{96A2CA2C-3233-4FDA-957F-44D10B68046E}" presName="sibTrans" presStyleCnt="0"/>
-      <dgm:spPr/>
-    </dgm:pt>
-    <dgm:pt modelId="{2D728F98-3778-455C-ADE8-7A297911D568}" type="pres">
-      <dgm:prSet presAssocID="{225A34C3-4361-4FAD-AA49-F50FA5E5DFE0}" presName="node" presStyleLbl="node1" presStyleIdx="2" presStyleCnt="6">
-        <dgm:presLayoutVars>
-          <dgm:bulletEnabled val="1"/>
-        </dgm:presLayoutVars>
-      </dgm:prSet>
-      <dgm:spPr/>
-    </dgm:pt>
-    <dgm:pt modelId="{4CD0FBC0-289E-4D85-B7C5-E15EF42CC5F1}" type="pres">
-      <dgm:prSet presAssocID="{7BC1F7DB-216E-429A-A17E-4CED852C08D5}" presName="sibTrans" presStyleCnt="0"/>
-      <dgm:spPr/>
-    </dgm:pt>
-    <dgm:pt modelId="{DFBCA8CC-4A45-4472-88C8-F9F623EA4E87}" type="pres">
-      <dgm:prSet presAssocID="{D5D67524-3570-4647-8405-4334CD284133}" presName="node" presStyleLbl="node1" presStyleIdx="3" presStyleCnt="6">
-        <dgm:presLayoutVars>
-          <dgm:bulletEnabled val="1"/>
-        </dgm:presLayoutVars>
-      </dgm:prSet>
-      <dgm:spPr/>
-    </dgm:pt>
-    <dgm:pt modelId="{E3904CCB-496B-45E1-BB28-CAC90F84477B}" type="pres">
-      <dgm:prSet presAssocID="{E0470548-B5CF-402F-97D8-C3EC515AAFAA}" presName="sibTrans" presStyleCnt="0"/>
-      <dgm:spPr/>
-    </dgm:pt>
-    <dgm:pt modelId="{F055DA6A-3204-4BB1-8A50-FE4321A6AC26}" type="pres">
-      <dgm:prSet presAssocID="{92FF9449-A242-4394-B5EB-806FC9F4ABBC}" presName="node" presStyleLbl="node1" presStyleIdx="4" presStyleCnt="6">
-        <dgm:presLayoutVars>
-          <dgm:bulletEnabled val="1"/>
-        </dgm:presLayoutVars>
-      </dgm:prSet>
-      <dgm:spPr/>
-    </dgm:pt>
-    <dgm:pt modelId="{0AC7E20D-8A6D-4E75-89FE-212FD857AC03}" type="pres">
-      <dgm:prSet presAssocID="{16F5D80C-CC65-42F1-BA3C-AAB8FB329296}" presName="sibTrans" presStyleCnt="0"/>
-      <dgm:spPr/>
-    </dgm:pt>
-    <dgm:pt modelId="{2B876386-2D9B-49F3-92CA-8B948ED4E0C8}" type="pres">
-      <dgm:prSet presAssocID="{97C4D82F-1611-49FB-B459-C07DB54DE587}" presName="node" presStyleLbl="node1" presStyleIdx="5" presStyleCnt="6">
-        <dgm:presLayoutVars>
-          <dgm:bulletEnabled val="1"/>
-        </dgm:presLayoutVars>
-      </dgm:prSet>
-      <dgm:spPr/>
-    </dgm:pt>
   </dgm:ptLst>
   <dgm:cxnLst>
-    <dgm:cxn modelId="{C4E02B2C-25D9-4F30-8797-902E77492D7C}" srcId="{877DE1CA-25A3-4626-8323-8AA05FAEB59F}" destId="{1D3BD650-89EA-4225-8C5F-59B752EC29B5}" srcOrd="1" destOrd="0" parTransId="{24B70A62-97F0-42C7-A41D-B44989A57C61}" sibTransId="{96A2CA2C-3233-4FDA-957F-44D10B68046E}"/>
-    <dgm:cxn modelId="{1AF8A544-DDEE-4917-BF24-93B8349CFEEA}" type="presOf" srcId="{1D3BD650-89EA-4225-8C5F-59B752EC29B5}" destId="{24E4B390-B070-4B01-B1C8-BB6E6030A606}" srcOrd="0" destOrd="0" presId="urn:microsoft.com/office/officeart/2005/8/layout/hList6"/>
-    <dgm:cxn modelId="{486B184C-3A92-441A-BB88-52C96437FE7F}" srcId="{877DE1CA-25A3-4626-8323-8AA05FAEB59F}" destId="{225A34C3-4361-4FAD-AA49-F50FA5E5DFE0}" srcOrd="2" destOrd="0" parTransId="{517275C4-0198-47A2-A60D-BFB5A00E67D0}" sibTransId="{7BC1F7DB-216E-429A-A17E-4CED852C08D5}"/>
-    <dgm:cxn modelId="{D8E13E6C-0849-4A51-96F2-CC994A59A103}" type="presOf" srcId="{2D5CF550-4FEE-42AC-BA8F-8CE7EC76C554}" destId="{17F2F626-64C4-4E99-8A1A-63B669781CCA}" srcOrd="0" destOrd="0" presId="urn:microsoft.com/office/officeart/2005/8/layout/hList6"/>
-    <dgm:cxn modelId="{674F8C6D-2562-4A10-9592-A2CA9BC254BB}" type="presOf" srcId="{D5D67524-3570-4647-8405-4334CD284133}" destId="{DFBCA8CC-4A45-4472-88C8-F9F623EA4E87}" srcOrd="0" destOrd="0" presId="urn:microsoft.com/office/officeart/2005/8/layout/hList6"/>
-    <dgm:cxn modelId="{94FD7353-39CB-4EB7-85E5-18C0544DD4E8}" type="presOf" srcId="{225A34C3-4361-4FAD-AA49-F50FA5E5DFE0}" destId="{2D728F98-3778-455C-ADE8-7A297911D568}" srcOrd="0" destOrd="0" presId="urn:microsoft.com/office/officeart/2005/8/layout/hList6"/>
-    <dgm:cxn modelId="{1EEE3D7F-B786-4A1F-B061-9575B63AEEB5}" srcId="{877DE1CA-25A3-4626-8323-8AA05FAEB59F}" destId="{97C4D82F-1611-49FB-B459-C07DB54DE587}" srcOrd="5" destOrd="0" parTransId="{C179129C-511A-4EB6-A2F0-480C186F55BA}" sibTransId="{B93E0B91-A60F-4943-BF56-B8E490587656}"/>
-    <dgm:cxn modelId="{18D1D086-2496-4499-A8FA-082F9068D5BF}" srcId="{877DE1CA-25A3-4626-8323-8AA05FAEB59F}" destId="{92FF9449-A242-4394-B5EB-806FC9F4ABBC}" srcOrd="4" destOrd="0" parTransId="{5F33266E-3BB7-4EB6-9D78-C816ACF83B7B}" sibTransId="{16F5D80C-CC65-42F1-BA3C-AAB8FB329296}"/>
-    <dgm:cxn modelId="{E8254187-1C85-47EE-98BE-B74BCDB84611}" type="presOf" srcId="{97C4D82F-1611-49FB-B459-C07DB54DE587}" destId="{2B876386-2D9B-49F3-92CA-8B948ED4E0C8}" srcOrd="0" destOrd="0" presId="urn:microsoft.com/office/officeart/2005/8/layout/hList6"/>
-    <dgm:cxn modelId="{343EFAB2-C768-49B0-A9E9-2DFE61F6C2D2}" type="presOf" srcId="{92FF9449-A242-4394-B5EB-806FC9F4ABBC}" destId="{F055DA6A-3204-4BB1-8A50-FE4321A6AC26}" srcOrd="0" destOrd="0" presId="urn:microsoft.com/office/officeart/2005/8/layout/hList6"/>
     <dgm:cxn modelId="{6C34E2D1-8333-4AE4-B815-93F7FF53D87D}" type="presOf" srcId="{877DE1CA-25A3-4626-8323-8AA05FAEB59F}" destId="{DF2C30CB-E015-406C-B2E6-E31DA278BF6E}" srcOrd="0" destOrd="0" presId="urn:microsoft.com/office/officeart/2005/8/layout/hList6"/>
-    <dgm:cxn modelId="{77B9F7E4-C0C4-4BE4-BD8B-6423F89964AC}" srcId="{877DE1CA-25A3-4626-8323-8AA05FAEB59F}" destId="{2D5CF550-4FEE-42AC-BA8F-8CE7EC76C554}" srcOrd="0" destOrd="0" parTransId="{0F6B2D0A-4A8A-4B0C-9991-14419C2B9FF3}" sibTransId="{CE70F5C8-4B90-49EF-945F-87B26016C58D}"/>
-    <dgm:cxn modelId="{C06A87EB-8B2B-41FD-AF37-0F16A77E286E}" srcId="{877DE1CA-25A3-4626-8323-8AA05FAEB59F}" destId="{D5D67524-3570-4647-8405-4334CD284133}" srcOrd="3" destOrd="0" parTransId="{64FCBB5A-6DE4-4F61-B7D8-D42FD73F215D}" sibTransId="{E0470548-B5CF-402F-97D8-C3EC515AAFAA}"/>
-    <dgm:cxn modelId="{9B574819-BF62-4BBE-A2EA-7D937B2B595A}" type="presParOf" srcId="{DF2C30CB-E015-406C-B2E6-E31DA278BF6E}" destId="{17F2F626-64C4-4E99-8A1A-63B669781CCA}" srcOrd="0" destOrd="0" presId="urn:microsoft.com/office/officeart/2005/8/layout/hList6"/>
-    <dgm:cxn modelId="{C5302AB1-3B71-4AF0-8486-57E7F2E6C60B}" type="presParOf" srcId="{DF2C30CB-E015-406C-B2E6-E31DA278BF6E}" destId="{862F16FC-C970-47EB-91E5-C2822D309234}" srcOrd="1" destOrd="0" presId="urn:microsoft.com/office/officeart/2005/8/layout/hList6"/>
-    <dgm:cxn modelId="{B5D7C55E-61A4-4F65-9674-F2A87A95FC1B}" type="presParOf" srcId="{DF2C30CB-E015-406C-B2E6-E31DA278BF6E}" destId="{24E4B390-B070-4B01-B1C8-BB6E6030A606}" srcOrd="2" destOrd="0" presId="urn:microsoft.com/office/officeart/2005/8/layout/hList6"/>
-    <dgm:cxn modelId="{E0115E13-DA35-49CA-872B-466B65AD54A2}" type="presParOf" srcId="{DF2C30CB-E015-406C-B2E6-E31DA278BF6E}" destId="{2E68FC82-4489-49A6-B0E1-CC46A8978288}" srcOrd="3" destOrd="0" presId="urn:microsoft.com/office/officeart/2005/8/layout/hList6"/>
-    <dgm:cxn modelId="{F7D686D4-8C59-440F-9E3B-B1B4CAB1BEC0}" type="presParOf" srcId="{DF2C30CB-E015-406C-B2E6-E31DA278BF6E}" destId="{2D728F98-3778-455C-ADE8-7A297911D568}" srcOrd="4" destOrd="0" presId="urn:microsoft.com/office/officeart/2005/8/layout/hList6"/>
-    <dgm:cxn modelId="{2A95B96D-5467-4AA2-A67E-BC4EDB2684FD}" type="presParOf" srcId="{DF2C30CB-E015-406C-B2E6-E31DA278BF6E}" destId="{4CD0FBC0-289E-4D85-B7C5-E15EF42CC5F1}" srcOrd="5" destOrd="0" presId="urn:microsoft.com/office/officeart/2005/8/layout/hList6"/>
-    <dgm:cxn modelId="{B9AE8C62-6C4E-4570-98F8-1997E0473AEC}" type="presParOf" srcId="{DF2C30CB-E015-406C-B2E6-E31DA278BF6E}" destId="{DFBCA8CC-4A45-4472-88C8-F9F623EA4E87}" srcOrd="6" destOrd="0" presId="urn:microsoft.com/office/officeart/2005/8/layout/hList6"/>
-    <dgm:cxn modelId="{FAFA2639-59B2-47FA-95B8-1EA9708362F4}" type="presParOf" srcId="{DF2C30CB-E015-406C-B2E6-E31DA278BF6E}" destId="{E3904CCB-496B-45E1-BB28-CAC90F84477B}" srcOrd="7" destOrd="0" presId="urn:microsoft.com/office/officeart/2005/8/layout/hList6"/>
-    <dgm:cxn modelId="{95406812-1E39-4DC5-8C10-EC93E7345628}" type="presParOf" srcId="{DF2C30CB-E015-406C-B2E6-E31DA278BF6E}" destId="{F055DA6A-3204-4BB1-8A50-FE4321A6AC26}" srcOrd="8" destOrd="0" presId="urn:microsoft.com/office/officeart/2005/8/layout/hList6"/>
-    <dgm:cxn modelId="{0ECC6547-E116-47F7-B40E-EFA70FDB55D5}" type="presParOf" srcId="{DF2C30CB-E015-406C-B2E6-E31DA278BF6E}" destId="{0AC7E20D-8A6D-4E75-89FE-212FD857AC03}" srcOrd="9" destOrd="0" presId="urn:microsoft.com/office/officeart/2005/8/layout/hList6"/>
-    <dgm:cxn modelId="{28A9C766-297F-44D1-85FB-18D6409C665B}" type="presParOf" srcId="{DF2C30CB-E015-406C-B2E6-E31DA278BF6E}" destId="{2B876386-2D9B-49F3-92CA-8B948ED4E0C8}" srcOrd="10" destOrd="0" presId="urn:microsoft.com/office/officeart/2005/8/layout/hList6"/>
   </dgm:cxnLst>
   <dgm:bg/>
   <dgm:whole/>
@@ -1249,664 +988,6 @@
       <dsp:cNvGrpSpPr/>
     </dsp:nvGrpSpPr>
     <dsp:grpSpPr/>
-    <dsp:sp modelId="{17F2F626-64C4-4E99-8A1A-63B669781CCA}">
-      <dsp:nvSpPr>
-        <dsp:cNvPr id="0" name=""/>
-        <dsp:cNvSpPr/>
-      </dsp:nvSpPr>
-      <dsp:spPr>
-        <a:xfrm rot="16200000">
-          <a:off x="-1380939" y="1385359"/>
-          <a:ext cx="4516749" cy="1746030"/>
-        </a:xfrm>
-        <a:prstGeom prst="flowChartManualOperation">
-          <a:avLst/>
-        </a:prstGeom>
-        <a:gradFill rotWithShape="0">
-          <a:gsLst>
-            <a:gs pos="0">
-              <a:schemeClr val="accent2">
-                <a:hueOff val="0"/>
-                <a:satOff val="0"/>
-                <a:lumOff val="0"/>
-                <a:alphaOff val="0"/>
-                <a:lumMod val="110000"/>
-                <a:satMod val="105000"/>
-                <a:tint val="67000"/>
-              </a:schemeClr>
-            </a:gs>
-            <a:gs pos="50000">
-              <a:schemeClr val="accent2">
-                <a:hueOff val="0"/>
-                <a:satOff val="0"/>
-                <a:lumOff val="0"/>
-                <a:alphaOff val="0"/>
-                <a:lumMod val="105000"/>
-                <a:satMod val="103000"/>
-                <a:tint val="73000"/>
-              </a:schemeClr>
-            </a:gs>
-            <a:gs pos="100000">
-              <a:schemeClr val="accent2">
-                <a:hueOff val="0"/>
-                <a:satOff val="0"/>
-                <a:lumOff val="0"/>
-                <a:alphaOff val="0"/>
-                <a:lumMod val="105000"/>
-                <a:satMod val="109000"/>
-                <a:tint val="81000"/>
-              </a:schemeClr>
-            </a:gs>
-          </a:gsLst>
-          <a:lin ang="5400000" scaled="0"/>
-        </a:gradFill>
-        <a:ln>
-          <a:noFill/>
-        </a:ln>
-        <a:effectLst/>
-        <a:scene3d>
-          <a:camera prst="orthographicFront"/>
-          <a:lightRig rig="flat" dir="t"/>
-        </a:scene3d>
-        <a:sp3d prstMaterial="dkEdge">
-          <a:bevelT w="8200" h="38100"/>
-        </a:sp3d>
-      </dsp:spPr>
-      <dsp:style>
-        <a:lnRef idx="0">
-          <a:scrgbClr r="0" g="0" b="0"/>
-        </a:lnRef>
-        <a:fillRef idx="2">
-          <a:scrgbClr r="0" g="0" b="0"/>
-        </a:fillRef>
-        <a:effectRef idx="1">
-          <a:scrgbClr r="0" g="0" b="0"/>
-        </a:effectRef>
-        <a:fontRef idx="minor">
-          <a:schemeClr val="dk1"/>
-        </a:fontRef>
-      </dsp:style>
-      <dsp:txBody>
-        <a:bodyPr spcFirstLastPara="0" vert="horz" wrap="square" lIns="95250" tIns="0" rIns="97861" bIns="0" numCol="1" spcCol="1270" anchor="ctr" anchorCtr="0">
-          <a:noAutofit/>
-        </a:bodyPr>
-        <a:lstStyle/>
-        <a:p>
-          <a:pPr marL="0" lvl="0" indent="0" algn="ctr" defTabSz="666750">
-            <a:lnSpc>
-              <a:spcPct val="90000"/>
-            </a:lnSpc>
-            <a:spcBef>
-              <a:spcPct val="0"/>
-            </a:spcBef>
-            <a:spcAft>
-              <a:spcPct val="35000"/>
-            </a:spcAft>
-            <a:buNone/>
-          </a:pPr>
-          <a:r>
-            <a:rPr lang="en-GB" sz="1500" kern="1200" dirty="0"/>
-            <a:t>User Input</a:t>
-          </a:r>
-          <a:endParaRPr lang="en-US" sz="1500" kern="1200" dirty="0"/>
-        </a:p>
-      </dsp:txBody>
-      <dsp:txXfrm rot="5400000">
-        <a:off x="4420" y="903350"/>
-        <a:ext cx="1746030" cy="2710049"/>
-      </dsp:txXfrm>
-    </dsp:sp>
-    <dsp:sp modelId="{24E4B390-B070-4B01-B1C8-BB6E6030A606}">
-      <dsp:nvSpPr>
-        <dsp:cNvPr id="0" name=""/>
-        <dsp:cNvSpPr/>
-      </dsp:nvSpPr>
-      <dsp:spPr>
-        <a:xfrm rot="16200000">
-          <a:off x="496043" y="1385359"/>
-          <a:ext cx="4516749" cy="1746030"/>
-        </a:xfrm>
-        <a:prstGeom prst="flowChartManualOperation">
-          <a:avLst/>
-        </a:prstGeom>
-        <a:gradFill rotWithShape="0">
-          <a:gsLst>
-            <a:gs pos="0">
-              <a:schemeClr val="accent2">
-                <a:hueOff val="0"/>
-                <a:satOff val="0"/>
-                <a:lumOff val="0"/>
-                <a:alphaOff val="0"/>
-                <a:lumMod val="110000"/>
-                <a:satMod val="105000"/>
-                <a:tint val="67000"/>
-              </a:schemeClr>
-            </a:gs>
-            <a:gs pos="50000">
-              <a:schemeClr val="accent2">
-                <a:hueOff val="0"/>
-                <a:satOff val="0"/>
-                <a:lumOff val="0"/>
-                <a:alphaOff val="0"/>
-                <a:lumMod val="105000"/>
-                <a:satMod val="103000"/>
-                <a:tint val="73000"/>
-              </a:schemeClr>
-            </a:gs>
-            <a:gs pos="100000">
-              <a:schemeClr val="accent2">
-                <a:hueOff val="0"/>
-                <a:satOff val="0"/>
-                <a:lumOff val="0"/>
-                <a:alphaOff val="0"/>
-                <a:lumMod val="105000"/>
-                <a:satMod val="109000"/>
-                <a:tint val="81000"/>
-              </a:schemeClr>
-            </a:gs>
-          </a:gsLst>
-          <a:lin ang="5400000" scaled="0"/>
-        </a:gradFill>
-        <a:ln>
-          <a:noFill/>
-        </a:ln>
-        <a:effectLst/>
-        <a:scene3d>
-          <a:camera prst="orthographicFront"/>
-          <a:lightRig rig="flat" dir="t"/>
-        </a:scene3d>
-        <a:sp3d prstMaterial="dkEdge">
-          <a:bevelT w="8200" h="38100"/>
-        </a:sp3d>
-      </dsp:spPr>
-      <dsp:style>
-        <a:lnRef idx="0">
-          <a:scrgbClr r="0" g="0" b="0"/>
-        </a:lnRef>
-        <a:fillRef idx="2">
-          <a:scrgbClr r="0" g="0" b="0"/>
-        </a:fillRef>
-        <a:effectRef idx="1">
-          <a:scrgbClr r="0" g="0" b="0"/>
-        </a:effectRef>
-        <a:fontRef idx="minor">
-          <a:schemeClr val="dk1"/>
-        </a:fontRef>
-      </dsp:style>
-      <dsp:txBody>
-        <a:bodyPr spcFirstLastPara="0" vert="horz" wrap="square" lIns="95250" tIns="0" rIns="97861" bIns="0" numCol="1" spcCol="1270" anchor="ctr" anchorCtr="0">
-          <a:noAutofit/>
-        </a:bodyPr>
-        <a:lstStyle/>
-        <a:p>
-          <a:pPr marL="0" lvl="0" indent="0" algn="ctr" defTabSz="666750">
-            <a:lnSpc>
-              <a:spcPct val="90000"/>
-            </a:lnSpc>
-            <a:spcBef>
-              <a:spcPct val="0"/>
-            </a:spcBef>
-            <a:spcAft>
-              <a:spcPct val="35000"/>
-            </a:spcAft>
-            <a:buNone/>
-          </a:pPr>
-          <a:r>
-            <a:rPr lang="en-GB" sz="1500" kern="1200" dirty="0" err="1"/>
-            <a:t>Streamlit</a:t>
-          </a:r>
-          <a:r>
-            <a:rPr lang="en-GB" sz="1500" kern="1200" dirty="0"/>
-            <a:t> UI</a:t>
-          </a:r>
-          <a:endParaRPr lang="en-US" sz="1500" kern="1200" dirty="0"/>
-        </a:p>
-      </dsp:txBody>
-      <dsp:txXfrm rot="5400000">
-        <a:off x="1881402" y="903350"/>
-        <a:ext cx="1746030" cy="2710049"/>
-      </dsp:txXfrm>
-    </dsp:sp>
-    <dsp:sp modelId="{2D728F98-3778-455C-ADE8-7A297911D568}">
-      <dsp:nvSpPr>
-        <dsp:cNvPr id="0" name=""/>
-        <dsp:cNvSpPr/>
-      </dsp:nvSpPr>
-      <dsp:spPr>
-        <a:xfrm rot="16200000">
-          <a:off x="2373026" y="1385359"/>
-          <a:ext cx="4516749" cy="1746030"/>
-        </a:xfrm>
-        <a:prstGeom prst="flowChartManualOperation">
-          <a:avLst/>
-        </a:prstGeom>
-        <a:gradFill rotWithShape="0">
-          <a:gsLst>
-            <a:gs pos="0">
-              <a:schemeClr val="accent2">
-                <a:hueOff val="0"/>
-                <a:satOff val="0"/>
-                <a:lumOff val="0"/>
-                <a:alphaOff val="0"/>
-                <a:lumMod val="110000"/>
-                <a:satMod val="105000"/>
-                <a:tint val="67000"/>
-              </a:schemeClr>
-            </a:gs>
-            <a:gs pos="50000">
-              <a:schemeClr val="accent2">
-                <a:hueOff val="0"/>
-                <a:satOff val="0"/>
-                <a:lumOff val="0"/>
-                <a:alphaOff val="0"/>
-                <a:lumMod val="105000"/>
-                <a:satMod val="103000"/>
-                <a:tint val="73000"/>
-              </a:schemeClr>
-            </a:gs>
-            <a:gs pos="100000">
-              <a:schemeClr val="accent2">
-                <a:hueOff val="0"/>
-                <a:satOff val="0"/>
-                <a:lumOff val="0"/>
-                <a:alphaOff val="0"/>
-                <a:lumMod val="105000"/>
-                <a:satMod val="109000"/>
-                <a:tint val="81000"/>
-              </a:schemeClr>
-            </a:gs>
-          </a:gsLst>
-          <a:lin ang="5400000" scaled="0"/>
-        </a:gradFill>
-        <a:ln>
-          <a:noFill/>
-        </a:ln>
-        <a:effectLst/>
-        <a:scene3d>
-          <a:camera prst="orthographicFront"/>
-          <a:lightRig rig="flat" dir="t"/>
-        </a:scene3d>
-        <a:sp3d prstMaterial="dkEdge">
-          <a:bevelT w="8200" h="38100"/>
-        </a:sp3d>
-      </dsp:spPr>
-      <dsp:style>
-        <a:lnRef idx="0">
-          <a:scrgbClr r="0" g="0" b="0"/>
-        </a:lnRef>
-        <a:fillRef idx="2">
-          <a:scrgbClr r="0" g="0" b="0"/>
-        </a:fillRef>
-        <a:effectRef idx="1">
-          <a:scrgbClr r="0" g="0" b="0"/>
-        </a:effectRef>
-        <a:fontRef idx="minor">
-          <a:schemeClr val="dk1"/>
-        </a:fontRef>
-      </dsp:style>
-      <dsp:txBody>
-        <a:bodyPr spcFirstLastPara="0" vert="horz" wrap="square" lIns="95250" tIns="0" rIns="97861" bIns="0" numCol="1" spcCol="1270" anchor="ctr" anchorCtr="0">
-          <a:noAutofit/>
-        </a:bodyPr>
-        <a:lstStyle/>
-        <a:p>
-          <a:pPr marL="0" lvl="0" indent="0" algn="ctr" defTabSz="666750">
-            <a:lnSpc>
-              <a:spcPct val="90000"/>
-            </a:lnSpc>
-            <a:spcBef>
-              <a:spcPct val="0"/>
-            </a:spcBef>
-            <a:spcAft>
-              <a:spcPct val="35000"/>
-            </a:spcAft>
-            <a:buNone/>
-          </a:pPr>
-          <a:r>
-            <a:rPr lang="en-GB" sz="1500" kern="1200" dirty="0" err="1"/>
-            <a:t>Groq</a:t>
-          </a:r>
-          <a:r>
-            <a:rPr lang="en-GB" sz="1500" kern="1200" dirty="0"/>
-            <a:t> AI (Whisper-Large für STT)</a:t>
-          </a:r>
-          <a:endParaRPr lang="en-US" sz="1500" kern="1200" dirty="0"/>
-        </a:p>
-      </dsp:txBody>
-      <dsp:txXfrm rot="5400000">
-        <a:off x="3758385" y="903350"/>
-        <a:ext cx="1746030" cy="2710049"/>
-      </dsp:txXfrm>
-    </dsp:sp>
-    <dsp:sp modelId="{DFBCA8CC-4A45-4472-88C8-F9F623EA4E87}">
-      <dsp:nvSpPr>
-        <dsp:cNvPr id="0" name=""/>
-        <dsp:cNvSpPr/>
-      </dsp:nvSpPr>
-      <dsp:spPr>
-        <a:xfrm rot="16200000">
-          <a:off x="4250008" y="1385359"/>
-          <a:ext cx="4516749" cy="1746030"/>
-        </a:xfrm>
-        <a:prstGeom prst="flowChartManualOperation">
-          <a:avLst/>
-        </a:prstGeom>
-        <a:gradFill rotWithShape="0">
-          <a:gsLst>
-            <a:gs pos="0">
-              <a:schemeClr val="accent2">
-                <a:hueOff val="0"/>
-                <a:satOff val="0"/>
-                <a:lumOff val="0"/>
-                <a:alphaOff val="0"/>
-                <a:lumMod val="110000"/>
-                <a:satMod val="105000"/>
-                <a:tint val="67000"/>
-              </a:schemeClr>
-            </a:gs>
-            <a:gs pos="50000">
-              <a:schemeClr val="accent2">
-                <a:hueOff val="0"/>
-                <a:satOff val="0"/>
-                <a:lumOff val="0"/>
-                <a:alphaOff val="0"/>
-                <a:lumMod val="105000"/>
-                <a:satMod val="103000"/>
-                <a:tint val="73000"/>
-              </a:schemeClr>
-            </a:gs>
-            <a:gs pos="100000">
-              <a:schemeClr val="accent2">
-                <a:hueOff val="0"/>
-                <a:satOff val="0"/>
-                <a:lumOff val="0"/>
-                <a:alphaOff val="0"/>
-                <a:lumMod val="105000"/>
-                <a:satMod val="109000"/>
-                <a:tint val="81000"/>
-              </a:schemeClr>
-            </a:gs>
-          </a:gsLst>
-          <a:lin ang="5400000" scaled="0"/>
-        </a:gradFill>
-        <a:ln>
-          <a:noFill/>
-        </a:ln>
-        <a:effectLst/>
-        <a:scene3d>
-          <a:camera prst="orthographicFront"/>
-          <a:lightRig rig="flat" dir="t"/>
-        </a:scene3d>
-        <a:sp3d prstMaterial="dkEdge">
-          <a:bevelT w="8200" h="38100"/>
-        </a:sp3d>
-      </dsp:spPr>
-      <dsp:style>
-        <a:lnRef idx="0">
-          <a:scrgbClr r="0" g="0" b="0"/>
-        </a:lnRef>
-        <a:fillRef idx="2">
-          <a:scrgbClr r="0" g="0" b="0"/>
-        </a:fillRef>
-        <a:effectRef idx="1">
-          <a:scrgbClr r="0" g="0" b="0"/>
-        </a:effectRef>
-        <a:fontRef idx="minor">
-          <a:schemeClr val="dk1"/>
-        </a:fontRef>
-      </dsp:style>
-      <dsp:txBody>
-        <a:bodyPr spcFirstLastPara="0" vert="horz" wrap="square" lIns="95250" tIns="0" rIns="97861" bIns="0" numCol="1" spcCol="1270" anchor="ctr" anchorCtr="0">
-          <a:noAutofit/>
-        </a:bodyPr>
-        <a:lstStyle/>
-        <a:p>
-          <a:pPr marL="0" lvl="0" indent="0" algn="ctr" defTabSz="666750">
-            <a:lnSpc>
-              <a:spcPct val="90000"/>
-            </a:lnSpc>
-            <a:spcBef>
-              <a:spcPct val="0"/>
-            </a:spcBef>
-            <a:spcAft>
-              <a:spcPct val="35000"/>
-            </a:spcAft>
-            <a:buNone/>
-          </a:pPr>
-          <a:r>
-            <a:rPr lang="en-GB" sz="1500" kern="1200" dirty="0"/>
-            <a:t>Llama3.3 70b für </a:t>
-          </a:r>
-          <a:r>
-            <a:rPr lang="en-GB" sz="1500" kern="1200" dirty="0" err="1"/>
-            <a:t>semantische</a:t>
-          </a:r>
-          <a:r>
-            <a:rPr lang="en-GB" sz="1500" kern="1200" dirty="0"/>
-            <a:t> Analyse</a:t>
-          </a:r>
-          <a:endParaRPr lang="en-US" sz="1500" kern="1200" dirty="0"/>
-        </a:p>
-      </dsp:txBody>
-      <dsp:txXfrm rot="5400000">
-        <a:off x="5635367" y="903350"/>
-        <a:ext cx="1746030" cy="2710049"/>
-      </dsp:txXfrm>
-    </dsp:sp>
-    <dsp:sp modelId="{F055DA6A-3204-4BB1-8A50-FE4321A6AC26}">
-      <dsp:nvSpPr>
-        <dsp:cNvPr id="0" name=""/>
-        <dsp:cNvSpPr/>
-      </dsp:nvSpPr>
-      <dsp:spPr>
-        <a:xfrm rot="16200000">
-          <a:off x="6126991" y="1385359"/>
-          <a:ext cx="4516749" cy="1746030"/>
-        </a:xfrm>
-        <a:prstGeom prst="flowChartManualOperation">
-          <a:avLst/>
-        </a:prstGeom>
-        <a:gradFill rotWithShape="0">
-          <a:gsLst>
-            <a:gs pos="0">
-              <a:schemeClr val="accent2">
-                <a:hueOff val="0"/>
-                <a:satOff val="0"/>
-                <a:lumOff val="0"/>
-                <a:alphaOff val="0"/>
-                <a:lumMod val="110000"/>
-                <a:satMod val="105000"/>
-                <a:tint val="67000"/>
-              </a:schemeClr>
-            </a:gs>
-            <a:gs pos="50000">
-              <a:schemeClr val="accent2">
-                <a:hueOff val="0"/>
-                <a:satOff val="0"/>
-                <a:lumOff val="0"/>
-                <a:alphaOff val="0"/>
-                <a:lumMod val="105000"/>
-                <a:satMod val="103000"/>
-                <a:tint val="73000"/>
-              </a:schemeClr>
-            </a:gs>
-            <a:gs pos="100000">
-              <a:schemeClr val="accent2">
-                <a:hueOff val="0"/>
-                <a:satOff val="0"/>
-                <a:lumOff val="0"/>
-                <a:alphaOff val="0"/>
-                <a:lumMod val="105000"/>
-                <a:satMod val="109000"/>
-                <a:tint val="81000"/>
-              </a:schemeClr>
-            </a:gs>
-          </a:gsLst>
-          <a:lin ang="5400000" scaled="0"/>
-        </a:gradFill>
-        <a:ln>
-          <a:noFill/>
-        </a:ln>
-        <a:effectLst/>
-        <a:scene3d>
-          <a:camera prst="orthographicFront"/>
-          <a:lightRig rig="flat" dir="t"/>
-        </a:scene3d>
-        <a:sp3d prstMaterial="dkEdge">
-          <a:bevelT w="8200" h="38100"/>
-        </a:sp3d>
-      </dsp:spPr>
-      <dsp:style>
-        <a:lnRef idx="0">
-          <a:scrgbClr r="0" g="0" b="0"/>
-        </a:lnRef>
-        <a:fillRef idx="2">
-          <a:scrgbClr r="0" g="0" b="0"/>
-        </a:fillRef>
-        <a:effectRef idx="1">
-          <a:scrgbClr r="0" g="0" b="0"/>
-        </a:effectRef>
-        <a:fontRef idx="minor">
-          <a:schemeClr val="dk1"/>
-        </a:fontRef>
-      </dsp:style>
-      <dsp:txBody>
-        <a:bodyPr spcFirstLastPara="0" vert="horz" wrap="square" lIns="95250" tIns="0" rIns="97861" bIns="0" numCol="1" spcCol="1270" anchor="ctr" anchorCtr="0">
-          <a:noAutofit/>
-        </a:bodyPr>
-        <a:lstStyle/>
-        <a:p>
-          <a:pPr marL="0" lvl="0" indent="0" algn="ctr" defTabSz="666750">
-            <a:lnSpc>
-              <a:spcPct val="90000"/>
-            </a:lnSpc>
-            <a:spcBef>
-              <a:spcPct val="0"/>
-            </a:spcBef>
-            <a:spcAft>
-              <a:spcPct val="35000"/>
-            </a:spcAft>
-            <a:buNone/>
-          </a:pPr>
-          <a:r>
-            <a:rPr lang="en-GB" sz="1500" kern="1200"/>
-            <a:t>Supabase für Datenspeicherung </a:t>
-          </a:r>
-          <a:endParaRPr lang="en-US" sz="1500" kern="1200"/>
-        </a:p>
-      </dsp:txBody>
-      <dsp:txXfrm rot="5400000">
-        <a:off x="7512350" y="903350"/>
-        <a:ext cx="1746030" cy="2710049"/>
-      </dsp:txXfrm>
-    </dsp:sp>
-    <dsp:sp modelId="{2B876386-2D9B-49F3-92CA-8B948ED4E0C8}">
-      <dsp:nvSpPr>
-        <dsp:cNvPr id="0" name=""/>
-        <dsp:cNvSpPr/>
-      </dsp:nvSpPr>
-      <dsp:spPr>
-        <a:xfrm rot="16200000">
-          <a:off x="8003974" y="1385359"/>
-          <a:ext cx="4516749" cy="1746030"/>
-        </a:xfrm>
-        <a:prstGeom prst="flowChartManualOperation">
-          <a:avLst/>
-        </a:prstGeom>
-        <a:gradFill rotWithShape="0">
-          <a:gsLst>
-            <a:gs pos="0">
-              <a:schemeClr val="accent2">
-                <a:hueOff val="0"/>
-                <a:satOff val="0"/>
-                <a:lumOff val="0"/>
-                <a:alphaOff val="0"/>
-                <a:lumMod val="110000"/>
-                <a:satMod val="105000"/>
-                <a:tint val="67000"/>
-              </a:schemeClr>
-            </a:gs>
-            <a:gs pos="50000">
-              <a:schemeClr val="accent2">
-                <a:hueOff val="0"/>
-                <a:satOff val="0"/>
-                <a:lumOff val="0"/>
-                <a:alphaOff val="0"/>
-                <a:lumMod val="105000"/>
-                <a:satMod val="103000"/>
-                <a:tint val="73000"/>
-              </a:schemeClr>
-            </a:gs>
-            <a:gs pos="100000">
-              <a:schemeClr val="accent2">
-                <a:hueOff val="0"/>
-                <a:satOff val="0"/>
-                <a:lumOff val="0"/>
-                <a:alphaOff val="0"/>
-                <a:lumMod val="105000"/>
-                <a:satMod val="109000"/>
-                <a:tint val="81000"/>
-              </a:schemeClr>
-            </a:gs>
-          </a:gsLst>
-          <a:lin ang="5400000" scaled="0"/>
-        </a:gradFill>
-        <a:ln>
-          <a:noFill/>
-        </a:ln>
-        <a:effectLst/>
-        <a:scene3d>
-          <a:camera prst="orthographicFront"/>
-          <a:lightRig rig="flat" dir="t"/>
-        </a:scene3d>
-        <a:sp3d prstMaterial="dkEdge">
-          <a:bevelT w="8200" h="38100"/>
-        </a:sp3d>
-      </dsp:spPr>
-      <dsp:style>
-        <a:lnRef idx="0">
-          <a:scrgbClr r="0" g="0" b="0"/>
-        </a:lnRef>
-        <a:fillRef idx="2">
-          <a:scrgbClr r="0" g="0" b="0"/>
-        </a:fillRef>
-        <a:effectRef idx="1">
-          <a:scrgbClr r="0" g="0" b="0"/>
-        </a:effectRef>
-        <a:fontRef idx="minor">
-          <a:schemeClr val="dk1"/>
-        </a:fontRef>
-      </dsp:style>
-      <dsp:txBody>
-        <a:bodyPr spcFirstLastPara="0" vert="horz" wrap="square" lIns="95250" tIns="0" rIns="97861" bIns="0" numCol="1" spcCol="1270" anchor="ctr" anchorCtr="0">
-          <a:noAutofit/>
-        </a:bodyPr>
-        <a:lstStyle/>
-        <a:p>
-          <a:pPr marL="0" lvl="0" indent="0" algn="ctr" defTabSz="666750">
-            <a:lnSpc>
-              <a:spcPct val="90000"/>
-            </a:lnSpc>
-            <a:spcBef>
-              <a:spcPct val="0"/>
-            </a:spcBef>
-            <a:spcAft>
-              <a:spcPct val="35000"/>
-            </a:spcAft>
-            <a:buNone/>
-          </a:pPr>
-          <a:r>
-            <a:rPr lang="en-GB" sz="1500" kern="1200" dirty="0"/>
-            <a:t>Output</a:t>
-          </a:r>
-          <a:endParaRPr lang="en-US" sz="1500" kern="1200" dirty="0"/>
-        </a:p>
-      </dsp:txBody>
-      <dsp:txXfrm rot="5400000">
-        <a:off x="9389333" y="903350"/>
-        <a:ext cx="1746030" cy="2710049"/>
-      </dsp:txXfrm>
-    </dsp:sp>
   </dsp:spTree>
 </dsp:drawing>
 </file>
@@ -3225,7 +2306,7 @@
           <a:p>
             <a:fld id="{05E02316-A3A9-40CE-8399-988D8D269502}" type="datetimeFigureOut">
               <a:rPr lang="de-AT" smtClean="0"/>
-              <a:t>21.03.2026</a:t>
+              <a:t>22.03.2026</a:t>
             </a:fld>
             <a:endParaRPr lang="de-AT"/>
           </a:p>
@@ -3390,7 +2471,7 @@
           <a:p>
             <a:fld id="{F5E89DEF-C035-41A2-9AFE-A6026D4C04BE}" type="datetimeFigureOut">
               <a:rPr lang="de-AT" smtClean="0"/>
-              <a:t>21.03.2026</a:t>
+              <a:t>22.03.2026</a:t>
             </a:fld>
             <a:endParaRPr lang="de-AT"/>
           </a:p>
@@ -12623,7 +11704,13 @@
           <a:p>
             <a:r>
               <a:rPr lang="en-GB" dirty="0"/>
-              <a:t>Team 2 – Isaac Davila-Mendez, Adem </a:t>
+              <a:t>Team 2 </a:t>
+            </a:r>
+          </a:p>
+          <a:p>
+            <a:r>
+              <a:rPr lang="en-GB" dirty="0"/>
+              <a:t>Isaac Davila-Mendez, Adem </a:t>
             </a:r>
             <a:r>
               <a:rPr lang="en-GB" dirty="0" err="1"/>
@@ -12631,7 +11718,7 @@
             </a:r>
             <a:r>
               <a:rPr lang="en-GB" dirty="0"/>
-              <a:t>, Elias , Paul Traxler, Jason Sajovic</a:t>
+              <a:t>, Jason Sajovic, Elias Spreitzer, Paul Traxler</a:t>
             </a:r>
             <a:endParaRPr lang="LID4096" dirty="0"/>
           </a:p>
@@ -13067,7 +12154,7 @@
             <p:ph idx="1"/>
             <p:extLst>
               <p:ext uri="{D42A27DB-BD31-4B8C-83A1-F6EECF244321}">
-                <p14:modId xmlns:p14="http://schemas.microsoft.com/office/powerpoint/2010/main" val="4063474687"/>
+                <p14:modId xmlns:p14="http://schemas.microsoft.com/office/powerpoint/2010/main" val="1326955920"/>
               </p:ext>
             </p:extLst>
           </p:nvPr>
@@ -13107,6 +12194,43 @@
           </a:p>
         </p:txBody>
       </p:sp>
+      <p:pic>
+        <p:nvPicPr>
+          <p:cNvPr id="7" name="Picture 6">
+            <a:extLst>
+              <a:ext uri="{FF2B5EF4-FFF2-40B4-BE49-F238E27FC236}">
+                <a16:creationId xmlns:a16="http://schemas.microsoft.com/office/drawing/2014/main" id="{4B2B4173-09CA-1F11-04DA-1C8D72095470}"/>
+              </a:ext>
+            </a:extLst>
+          </p:cNvPr>
+          <p:cNvPicPr>
+            <a:picLocks noChangeAspect="1"/>
+          </p:cNvPicPr>
+          <p:nvPr/>
+        </p:nvPicPr>
+        <p:blipFill>
+          <a:blip r:embed="rId7">
+            <a:extLst>
+              <a:ext uri="{28A0092B-C50C-407E-A947-70E740481C1C}">
+                <a14:useLocalDpi xmlns:a14="http://schemas.microsoft.com/office/drawing/2010/main" val="0"/>
+              </a:ext>
+            </a:extLst>
+          </a:blip>
+          <a:srcRect t="31820" b="40276"/>
+          <a:stretch>
+            <a:fillRect/>
+          </a:stretch>
+        </p:blipFill>
+        <p:spPr>
+          <a:xfrm>
+            <a:off x="73181" y="2317305"/>
+            <a:ext cx="11952086" cy="2223390"/>
+          </a:xfrm>
+          <a:prstGeom prst="rect">
+            <a:avLst/>
+          </a:prstGeom>
+        </p:spPr>
+      </p:pic>
     </p:spTree>
     <p:extLst>
       <p:ext uri="{BB962C8B-B14F-4D97-AF65-F5344CB8AC3E}">
